--- a/docs/decks/Science_and_Publishability.pptx
+++ b/docs/decks/Science_and_Publishability.pptx
@@ -3300,7 +3300,7 @@
                   <a:srgbClr val="999999"/>
                 </a:solidFill>
               </a:rPr>
-              <a:t>code v1.4  ·  2026-07-12  ·  1/11</a:t>
+              <a:t>code v1.5  ·  2026-07-13  ·  1/11</a:t>
             </a:r>
           </a:p>
         </p:txBody>
@@ -3432,7 +3432,7 @@
                   <a:srgbClr val="2CA02C"/>
                 </a:solidFill>
               </a:rPr>
-              <a:t>- 1. Diurnal curve: run ~1 week continuously, plot counts vs local hour.</a:t>
+              <a:t>- 1. Diurnal curve: run ~1 week CONTINUOUSLY (24/7), plot rate vs local hour.</a:t>
             </a:r>
           </a:p>
           <a:p>
@@ -3459,9 +3459,129 @@
             <a:r>
               <a:rPr sz="1800">
                 <a:solidFill>
+                  <a:srgbClr val="C0392B"/>
+                </a:solidFill>
+              </a:rPr>
+              <a:t>-   WHY 24/7, NOT JUST NIGHTS: rate = counts / EXPOSURE. Observe only at</a:t>
+            </a:r>
+          </a:p>
+          <a:p>
+            <a:pPr lvl="1">
+              <a:spcAft>
+                <a:spcPts val="500"/>
+              </a:spcAft>
+            </a:pPr>
+            <a:r>
+              <a:rPr sz="1600">
+                <a:solidFill>
+                  <a:srgbClr val="555555"/>
+                </a:solidFill>
+              </a:rPr>
+              <a:t>  . night and the unobserved daytime hours look observed-but-empty -- their</a:t>
+            </a:r>
+          </a:p>
+          <a:p>
+            <a:pPr lvl="1">
+              <a:spcAft>
+                <a:spcPts val="500"/>
+              </a:spcAft>
+            </a:pPr>
+            <a:r>
+              <a:rPr sz="1600">
+                <a:solidFill>
+                  <a:srgbClr val="555555"/>
+                </a:solidFill>
+              </a:rPr>
+              <a:t>  . rate collapses and you MANUFACTURE the very curve you are testing for.</a:t>
+            </a:r>
+          </a:p>
+          <a:p>
+            <a:pPr lvl="1">
+              <a:spcAft>
+                <a:spcPts val="500"/>
+              </a:spcAft>
+            </a:pPr>
+            <a:r>
+              <a:rPr sz="1600">
+                <a:solidFill>
+                  <a:srgbClr val="555555"/>
+                </a:solidFill>
+              </a:rPr>
+              <a:t>  . v1.5's sessions.csv measures real exposure; running 24/7 also gives the</a:t>
+            </a:r>
+          </a:p>
+          <a:p>
+            <a:pPr lvl="1">
+              <a:spcAft>
+                <a:spcPts val="500"/>
+              </a:spcAft>
+            </a:pPr>
+            <a:r>
+              <a:rPr sz="1600">
+                <a:solidFill>
+                  <a:srgbClr val="555555"/>
+                </a:solidFill>
+              </a:rPr>
+              <a:t>  . daytime coverage the result needs to mean anything.</a:t>
+            </a:r>
+          </a:p>
+          <a:p>
+            <a:pPr>
+              <a:spcAft>
+                <a:spcPts val="500"/>
+              </a:spcAft>
+            </a:pPr>
+            <a:r>
+              <a:rPr sz="1800">
+                <a:solidFill>
                   <a:srgbClr val="2CA02C"/>
                 </a:solidFill>
               </a:rPr>
+              <a:t>-   THE CONTROL: also plot --class aircraft. Aircraft follow a HUMAN daily</a:t>
+            </a:r>
+          </a:p>
+          <a:p>
+            <a:pPr lvl="1">
+              <a:spcAft>
+                <a:spcPts val="500"/>
+              </a:spcAft>
+            </a:pPr>
+            <a:r>
+              <a:rPr sz="1600">
+                <a:solidFill>
+                  <a:srgbClr val="555555"/>
+                </a:solidFill>
+              </a:rPr>
+              <a:t>  . rhythm, nothing like the meteor one. If your meteor curve tracks it, the</a:t>
+            </a:r>
+          </a:p>
+          <a:p>
+            <a:pPr lvl="1">
+              <a:spcAft>
+                <a:spcPts val="500"/>
+              </a:spcAft>
+            </a:pPr>
+            <a:r>
+              <a:rPr sz="1600">
+                <a:solidFill>
+                  <a:srgbClr val="555555"/>
+                </a:solidFill>
+              </a:rPr>
+              <a:t>  . classifier is leaking and you are plotting air traffic.</a:t>
+            </a:r>
+          </a:p>
+          <a:p>
+            <a:pPr>
+              <a:spcAft>
+                <a:spcPts val="500"/>
+              </a:spcAft>
+            </a:pPr>
+            <a:r>
+              <a:rPr sz="1800">
+                <a:solidFill>
+                  <a:srgbClr val="2CA02C"/>
+                </a:solidFill>
+              </a:rPr>
               <a:t>- 2. Shower profile: capture Perseids (Aug 12-13); hourly counts vs time;</a:t>
             </a:r>
           </a:p>
@@ -3522,7 +3642,7 @@
                   <a:srgbClr val="222222"/>
                 </a:solidFill>
               </a:rPr>
-              <a:t>- Workflow: consistent setup + observing log (freq/gain/antenna/noise);</a:t>
+              <a:t>- Workflow: FREEZE the setup (freq/gain/threshold/antenna) for the whole run and</a:t>
             </a:r>
           </a:p>
           <a:p>
@@ -3537,7 +3657,7 @@
                   <a:srgbClr val="555555"/>
                 </a:solidFill>
               </a:rPr>
-              <a:t>  . session_report.py per night; filter aircraft/E-skip before analysis.</a:t>
+              <a:t>  . log it; filter aircraft + sporadic-E before analysis. Any change = new baseline.</a:t>
             </a:r>
           </a:p>
         </p:txBody>
@@ -3604,7 +3724,7 @@
                   <a:srgbClr val="999999"/>
                 </a:solidFill>
               </a:rPr>
-              <a:t>code v1.4  ·  2026-07-12  ·  10/11</a:t>
+              <a:t>code v1.5  ·  2026-07-13  ·  10/11</a:t>
             </a:r>
           </a:p>
         </p:txBody>
@@ -3893,7 +4013,7 @@
                   <a:srgbClr val="999999"/>
                 </a:solidFill>
               </a:rPr>
-              <a:t>code v1.4  ·  2026-07-12  ·  11/11</a:t>
+              <a:t>code v1.5  ·  2026-07-13  ·  11/11</a:t>
             </a:r>
           </a:p>
         </p:txBody>
@@ -4227,7 +4347,7 @@
                   <a:srgbClr val="999999"/>
                 </a:solidFill>
               </a:rPr>
-              <a:t>code v1.4  ·  2026-07-12  ·  2/11</a:t>
+              <a:t>code v1.5  ·  2026-07-13  ·  2/11</a:t>
             </a:r>
           </a:p>
         </p:txBody>
@@ -4531,7 +4651,7 @@
                   <a:srgbClr val="999999"/>
                 </a:solidFill>
               </a:rPr>
-              <a:t>code v1.4  ·  2026-07-12  ·  3/11</a:t>
+              <a:t>code v1.5  ·  2026-07-13  ·  3/11</a:t>
             </a:r>
           </a:p>
         </p:txBody>
@@ -4820,7 +4940,7 @@
                   <a:srgbClr val="999999"/>
                 </a:solidFill>
               </a:rPr>
-              <a:t>code v1.4  ·  2026-07-12  ·  4/11</a:t>
+              <a:t>code v1.5  ·  2026-07-13  ·  4/11</a:t>
             </a:r>
           </a:p>
         </p:txBody>
@@ -5109,7 +5229,7 @@
                   <a:srgbClr val="999999"/>
                 </a:solidFill>
               </a:rPr>
-              <a:t>code v1.4  ·  2026-07-12  ·  5/11</a:t>
+              <a:t>code v1.5  ·  2026-07-13  ·  5/11</a:t>
             </a:r>
           </a:p>
         </p:txBody>
@@ -5413,7 +5533,7 @@
                   <a:srgbClr val="999999"/>
                 </a:solidFill>
               </a:rPr>
-              <a:t>code v1.4  ·  2026-07-12  ·  6/11</a:t>
+              <a:t>code v1.5  ·  2026-07-13  ·  6/11</a:t>
             </a:r>
           </a:p>
         </p:txBody>
@@ -5702,7 +5822,7 @@
                   <a:srgbClr val="999999"/>
                 </a:solidFill>
               </a:rPr>
-              <a:t>code v1.4  ·  2026-07-12  ·  7/11</a:t>
+              <a:t>code v1.5  ·  2026-07-13  ·  7/11</a:t>
             </a:r>
           </a:p>
         </p:txBody>
@@ -6344,7 +6464,7 @@
                   <a:srgbClr val="999999"/>
                 </a:solidFill>
               </a:rPr>
-              <a:t>code v1.4  ·  2026-07-12  ·  8/11</a:t>
+              <a:t>code v1.5  ·  2026-07-13  ·  8/11</a:t>
             </a:r>
           </a:p>
         </p:txBody>
@@ -6663,7 +6783,7 @@
                   <a:srgbClr val="999999"/>
                 </a:solidFill>
               </a:rPr>
-              <a:t>code v1.4  ·  2026-07-12  ·  9/11</a:t>
+              <a:t>code v1.5  ·  2026-07-13  ·  9/11</a:t>
             </a:r>
           </a:p>
         </p:txBody>
